--- a/college-report/ClairSec_Mid_Project_Presentation.pptx
+++ b/college-report/ClairSec_Mid_Project_Presentation.pptx
@@ -5,22 +5,22 @@
     <p:sldMasterId id="2147483648" r:id="rId1"/>
   </p:sldMasterIdLst>
   <p:sldIdLst>
-    <p:sldId id="256" r:id="rId7"/>
-    <p:sldId id="257" r:id="rId8"/>
-    <p:sldId id="258" r:id="rId9"/>
-    <p:sldId id="259" r:id="rId10"/>
-    <p:sldId id="260" r:id="rId11"/>
-    <p:sldId id="261" r:id="rId12"/>
-    <p:sldId id="262" r:id="rId13"/>
-    <p:sldId id="263" r:id="rId14"/>
-    <p:sldId id="264" r:id="rId15"/>
-    <p:sldId id="265" r:id="rId16"/>
-    <p:sldId id="266" r:id="rId17"/>
-    <p:sldId id="267" r:id="rId18"/>
-    <p:sldId id="268" r:id="rId19"/>
-    <p:sldId id="269" r:id="rId20"/>
+    <p:sldId id="256" r:id="rId2"/>
+    <p:sldId id="257" r:id="rId3"/>
+    <p:sldId id="258" r:id="rId4"/>
+    <p:sldId id="259" r:id="rId5"/>
+    <p:sldId id="260" r:id="rId6"/>
+    <p:sldId id="261" r:id="rId7"/>
+    <p:sldId id="262" r:id="rId8"/>
+    <p:sldId id="263" r:id="rId9"/>
+    <p:sldId id="264" r:id="rId10"/>
+    <p:sldId id="265" r:id="rId11"/>
+    <p:sldId id="266" r:id="rId12"/>
+    <p:sldId id="267" r:id="rId13"/>
+    <p:sldId id="268" r:id="rId14"/>
+    <p:sldId id="269" r:id="rId15"/>
   </p:sldIdLst>
-  <p:sldSz cx="12191695" cy="6858000" type="screen4x3"/>
+  <p:sldSz cx="12192000" cy="6858000"/>
   <p:notesSz cx="6858000" cy="9144000"/>
   <p:defaultTextStyle>
     <a:defPPr>
@@ -117,6 +117,22 @@
       </a:defRPr>
     </a:lvl9pPr>
   </p:defaultTextStyle>
+  <p:extLst>
+    <p:ext uri="{EFAFB233-063F-42B5-8137-9DF3F51BA10A}">
+      <p15:sldGuideLst xmlns:p15="http://schemas.microsoft.com/office/powerpoint/2012/main">
+        <p15:guide id="1" orient="horz" pos="2160">
+          <p15:clr>
+            <a:srgbClr val="A4A3A4"/>
+          </p15:clr>
+        </p15:guide>
+        <p15:guide id="2" pos="2880">
+          <p15:clr>
+            <a:srgbClr val="A4A3A4"/>
+          </p15:clr>
+        </p15:guide>
+      </p15:sldGuideLst>
+    </p:ext>
+  </p:extLst>
 </p:presentation>
 </file>
 
@@ -158,10 +174,9 @@
           <a:lstStyle/>
           <a:p>
             <a:r>
-              <a:rPr lang="en-US" smtClean="0"/>
+              <a:rPr lang="en-US"/>
               <a:t>Click to edit Master title style</a:t>
             </a:r>
-            <a:endParaRPr lang="en-US"/>
           </a:p>
         </p:txBody>
       </p:sp>
@@ -277,10 +292,9 @@
           </a:lstStyle>
           <a:p>
             <a:r>
-              <a:rPr lang="en-US" smtClean="0"/>
+              <a:rPr lang="en-US"/>
               <a:t>Click to edit Master subtitle style</a:t>
             </a:r>
-            <a:endParaRPr lang="en-US"/>
           </a:p>
         </p:txBody>
       </p:sp>
@@ -301,7 +315,7 @@
           <a:p>
             <a:fld id="{5BCAD085-E8A6-8845-BD4E-CB4CCA059FC4}" type="datetimeFigureOut">
               <a:rPr lang="en-US" smtClean="0"/>
-              <a:t>1/27/13</a:t>
+              <a:t>9/10/2026</a:t>
             </a:fld>
             <a:endParaRPr lang="en-US"/>
           </a:p>
@@ -395,10 +409,9 @@
           <a:lstStyle/>
           <a:p>
             <a:r>
-              <a:rPr lang="en-US" smtClean="0"/>
+              <a:rPr lang="en-US"/>
               <a:t>Click to edit Master title style</a:t>
             </a:r>
-            <a:endParaRPr lang="en-US"/>
           </a:p>
         </p:txBody>
       </p:sp>
@@ -419,38 +432,37 @@
           <a:p>
             <a:pPr lvl="0"/>
             <a:r>
-              <a:rPr lang="en-US" smtClean="0"/>
+              <a:rPr lang="en-US"/>
               <a:t>Click to edit Master text styles</a:t>
             </a:r>
           </a:p>
           <a:p>
             <a:pPr lvl="1"/>
             <a:r>
-              <a:rPr lang="en-US" smtClean="0"/>
+              <a:rPr lang="en-US"/>
               <a:t>Second level</a:t>
             </a:r>
           </a:p>
           <a:p>
             <a:pPr lvl="2"/>
             <a:r>
-              <a:rPr lang="en-US" smtClean="0"/>
+              <a:rPr lang="en-US"/>
               <a:t>Third level</a:t>
             </a:r>
           </a:p>
           <a:p>
             <a:pPr lvl="3"/>
             <a:r>
-              <a:rPr lang="en-US" smtClean="0"/>
+              <a:rPr lang="en-US"/>
               <a:t>Fourth level</a:t>
             </a:r>
           </a:p>
           <a:p>
             <a:pPr lvl="4"/>
             <a:r>
-              <a:rPr lang="en-US" smtClean="0"/>
+              <a:rPr lang="en-US"/>
               <a:t>Fifth level</a:t>
             </a:r>
-            <a:endParaRPr lang="en-US"/>
           </a:p>
         </p:txBody>
       </p:sp>
@@ -471,7 +483,7 @@
           <a:p>
             <a:fld id="{5BCAD085-E8A6-8845-BD4E-CB4CCA059FC4}" type="datetimeFigureOut">
               <a:rPr lang="en-US" smtClean="0"/>
-              <a:t>1/27/13</a:t>
+              <a:t>9/10/2026</a:t>
             </a:fld>
             <a:endParaRPr lang="en-US"/>
           </a:p>
@@ -570,10 +582,9 @@
           <a:lstStyle/>
           <a:p>
             <a:r>
-              <a:rPr lang="en-US" smtClean="0"/>
+              <a:rPr lang="en-US"/>
               <a:t>Click to edit Master title style</a:t>
             </a:r>
-            <a:endParaRPr lang="en-US"/>
           </a:p>
         </p:txBody>
       </p:sp>
@@ -599,38 +610,37 @@
           <a:p>
             <a:pPr lvl="0"/>
             <a:r>
-              <a:rPr lang="en-US" smtClean="0"/>
+              <a:rPr lang="en-US"/>
               <a:t>Click to edit Master text styles</a:t>
             </a:r>
           </a:p>
           <a:p>
             <a:pPr lvl="1"/>
             <a:r>
-              <a:rPr lang="en-US" smtClean="0"/>
+              <a:rPr lang="en-US"/>
               <a:t>Second level</a:t>
             </a:r>
           </a:p>
           <a:p>
             <a:pPr lvl="2"/>
             <a:r>
-              <a:rPr lang="en-US" smtClean="0"/>
+              <a:rPr lang="en-US"/>
               <a:t>Third level</a:t>
             </a:r>
           </a:p>
           <a:p>
             <a:pPr lvl="3"/>
             <a:r>
-              <a:rPr lang="en-US" smtClean="0"/>
+              <a:rPr lang="en-US"/>
               <a:t>Fourth level</a:t>
             </a:r>
           </a:p>
           <a:p>
             <a:pPr lvl="4"/>
             <a:r>
-              <a:rPr lang="en-US" smtClean="0"/>
+              <a:rPr lang="en-US"/>
               <a:t>Fifth level</a:t>
             </a:r>
-            <a:endParaRPr lang="en-US"/>
           </a:p>
         </p:txBody>
       </p:sp>
@@ -651,7 +661,7 @@
           <a:p>
             <a:fld id="{5BCAD085-E8A6-8845-BD4E-CB4CCA059FC4}" type="datetimeFigureOut">
               <a:rPr lang="en-US" smtClean="0"/>
-              <a:t>1/27/13</a:t>
+              <a:t>9/10/2026</a:t>
             </a:fld>
             <a:endParaRPr lang="en-US"/>
           </a:p>
@@ -745,10 +755,9 @@
           <a:lstStyle/>
           <a:p>
             <a:r>
-              <a:rPr lang="en-US" smtClean="0"/>
+              <a:rPr lang="en-US"/>
               <a:t>Click to edit Master title style</a:t>
             </a:r>
-            <a:endParaRPr lang="en-US"/>
           </a:p>
         </p:txBody>
       </p:sp>
@@ -769,38 +778,37 @@
           <a:p>
             <a:pPr lvl="0"/>
             <a:r>
-              <a:rPr lang="en-US" smtClean="0"/>
+              <a:rPr lang="en-US"/>
               <a:t>Click to edit Master text styles</a:t>
             </a:r>
           </a:p>
           <a:p>
             <a:pPr lvl="1"/>
             <a:r>
-              <a:rPr lang="en-US" smtClean="0"/>
+              <a:rPr lang="en-US"/>
               <a:t>Second level</a:t>
             </a:r>
           </a:p>
           <a:p>
             <a:pPr lvl="2"/>
             <a:r>
-              <a:rPr lang="en-US" smtClean="0"/>
+              <a:rPr lang="en-US"/>
               <a:t>Third level</a:t>
             </a:r>
           </a:p>
           <a:p>
             <a:pPr lvl="3"/>
             <a:r>
-              <a:rPr lang="en-US" smtClean="0"/>
+              <a:rPr lang="en-US"/>
               <a:t>Fourth level</a:t>
             </a:r>
           </a:p>
           <a:p>
             <a:pPr lvl="4"/>
             <a:r>
-              <a:rPr lang="en-US" smtClean="0"/>
+              <a:rPr lang="en-US"/>
               <a:t>Fifth level</a:t>
             </a:r>
-            <a:endParaRPr lang="en-US"/>
           </a:p>
         </p:txBody>
       </p:sp>
@@ -821,7 +829,7 @@
           <a:p>
             <a:fld id="{5BCAD085-E8A6-8845-BD4E-CB4CCA059FC4}" type="datetimeFigureOut">
               <a:rPr lang="en-US" smtClean="0"/>
-              <a:t>1/27/13</a:t>
+              <a:t>9/10/2026</a:t>
             </a:fld>
             <a:endParaRPr lang="en-US"/>
           </a:p>
@@ -924,10 +932,9 @@
           </a:lstStyle>
           <a:p>
             <a:r>
-              <a:rPr lang="en-US" smtClean="0"/>
+              <a:rPr lang="en-US"/>
               <a:t>Click to edit Master title style</a:t>
             </a:r>
-            <a:endParaRPr lang="en-US"/>
           </a:p>
         </p:txBody>
       </p:sp>
@@ -1044,7 +1051,7 @@
           <a:p>
             <a:pPr lvl="0"/>
             <a:r>
-              <a:rPr lang="en-US" smtClean="0"/>
+              <a:rPr lang="en-US"/>
               <a:t>Click to edit Master text styles</a:t>
             </a:r>
           </a:p>
@@ -1067,7 +1074,7 @@
           <a:p>
             <a:fld id="{5BCAD085-E8A6-8845-BD4E-CB4CCA059FC4}" type="datetimeFigureOut">
               <a:rPr lang="en-US" smtClean="0"/>
-              <a:t>1/27/13</a:t>
+              <a:t>9/10/2026</a:t>
             </a:fld>
             <a:endParaRPr lang="en-US"/>
           </a:p>
@@ -1161,10 +1168,9 @@
           <a:lstStyle/>
           <a:p>
             <a:r>
-              <a:rPr lang="en-US" smtClean="0"/>
+              <a:rPr lang="en-US"/>
               <a:t>Click to edit Master title style</a:t>
             </a:r>
-            <a:endParaRPr lang="en-US"/>
           </a:p>
         </p:txBody>
       </p:sp>
@@ -1218,38 +1224,37 @@
           <a:p>
             <a:pPr lvl="0"/>
             <a:r>
-              <a:rPr lang="en-US" smtClean="0"/>
+              <a:rPr lang="en-US"/>
               <a:t>Click to edit Master text styles</a:t>
             </a:r>
           </a:p>
           <a:p>
             <a:pPr lvl="1"/>
             <a:r>
-              <a:rPr lang="en-US" smtClean="0"/>
+              <a:rPr lang="en-US"/>
               <a:t>Second level</a:t>
             </a:r>
           </a:p>
           <a:p>
             <a:pPr lvl="2"/>
             <a:r>
-              <a:rPr lang="en-US" smtClean="0"/>
+              <a:rPr lang="en-US"/>
               <a:t>Third level</a:t>
             </a:r>
           </a:p>
           <a:p>
             <a:pPr lvl="3"/>
             <a:r>
-              <a:rPr lang="en-US" smtClean="0"/>
+              <a:rPr lang="en-US"/>
               <a:t>Fourth level</a:t>
             </a:r>
           </a:p>
           <a:p>
             <a:pPr lvl="4"/>
             <a:r>
-              <a:rPr lang="en-US" smtClean="0"/>
+              <a:rPr lang="en-US"/>
               <a:t>Fifth level</a:t>
             </a:r>
-            <a:endParaRPr lang="en-US"/>
           </a:p>
         </p:txBody>
       </p:sp>
@@ -1303,38 +1308,37 @@
           <a:p>
             <a:pPr lvl="0"/>
             <a:r>
-              <a:rPr lang="en-US" smtClean="0"/>
+              <a:rPr lang="en-US"/>
               <a:t>Click to edit Master text styles</a:t>
             </a:r>
           </a:p>
           <a:p>
             <a:pPr lvl="1"/>
             <a:r>
-              <a:rPr lang="en-US" smtClean="0"/>
+              <a:rPr lang="en-US"/>
               <a:t>Second level</a:t>
             </a:r>
           </a:p>
           <a:p>
             <a:pPr lvl="2"/>
             <a:r>
-              <a:rPr lang="en-US" smtClean="0"/>
+              <a:rPr lang="en-US"/>
               <a:t>Third level</a:t>
             </a:r>
           </a:p>
           <a:p>
             <a:pPr lvl="3"/>
             <a:r>
-              <a:rPr lang="en-US" smtClean="0"/>
+              <a:rPr lang="en-US"/>
               <a:t>Fourth level</a:t>
             </a:r>
           </a:p>
           <a:p>
             <a:pPr lvl="4"/>
             <a:r>
-              <a:rPr lang="en-US" smtClean="0"/>
+              <a:rPr lang="en-US"/>
               <a:t>Fifth level</a:t>
             </a:r>
-            <a:endParaRPr lang="en-US"/>
           </a:p>
         </p:txBody>
       </p:sp>
@@ -1355,7 +1359,7 @@
           <a:p>
             <a:fld id="{5BCAD085-E8A6-8845-BD4E-CB4CCA059FC4}" type="datetimeFigureOut">
               <a:rPr lang="en-US" smtClean="0"/>
-              <a:t>1/27/13</a:t>
+              <a:t>9/10/2026</a:t>
             </a:fld>
             <a:endParaRPr lang="en-US"/>
           </a:p>
@@ -1453,10 +1457,9 @@
           </a:lstStyle>
           <a:p>
             <a:r>
-              <a:rPr lang="en-US" smtClean="0"/>
+              <a:rPr lang="en-US"/>
               <a:t>Click to edit Master title style</a:t>
             </a:r>
-            <a:endParaRPr lang="en-US"/>
           </a:p>
         </p:txBody>
       </p:sp>
@@ -1519,7 +1522,7 @@
           <a:p>
             <a:pPr lvl="0"/>
             <a:r>
-              <a:rPr lang="en-US" smtClean="0"/>
+              <a:rPr lang="en-US"/>
               <a:t>Click to edit Master text styles</a:t>
             </a:r>
           </a:p>
@@ -1575,38 +1578,37 @@
           <a:p>
             <a:pPr lvl="0"/>
             <a:r>
-              <a:rPr lang="en-US" smtClean="0"/>
+              <a:rPr lang="en-US"/>
               <a:t>Click to edit Master text styles</a:t>
             </a:r>
           </a:p>
           <a:p>
             <a:pPr lvl="1"/>
             <a:r>
-              <a:rPr lang="en-US" smtClean="0"/>
+              <a:rPr lang="en-US"/>
               <a:t>Second level</a:t>
             </a:r>
           </a:p>
           <a:p>
             <a:pPr lvl="2"/>
             <a:r>
-              <a:rPr lang="en-US" smtClean="0"/>
+              <a:rPr lang="en-US"/>
               <a:t>Third level</a:t>
             </a:r>
           </a:p>
           <a:p>
             <a:pPr lvl="3"/>
             <a:r>
-              <a:rPr lang="en-US" smtClean="0"/>
+              <a:rPr lang="en-US"/>
               <a:t>Fourth level</a:t>
             </a:r>
           </a:p>
           <a:p>
             <a:pPr lvl="4"/>
             <a:r>
-              <a:rPr lang="en-US" smtClean="0"/>
+              <a:rPr lang="en-US"/>
               <a:t>Fifth level</a:t>
             </a:r>
-            <a:endParaRPr lang="en-US"/>
           </a:p>
         </p:txBody>
       </p:sp>
@@ -1669,7 +1671,7 @@
           <a:p>
             <a:pPr lvl="0"/>
             <a:r>
-              <a:rPr lang="en-US" smtClean="0"/>
+              <a:rPr lang="en-US"/>
               <a:t>Click to edit Master text styles</a:t>
             </a:r>
           </a:p>
@@ -1725,38 +1727,37 @@
           <a:p>
             <a:pPr lvl="0"/>
             <a:r>
-              <a:rPr lang="en-US" smtClean="0"/>
+              <a:rPr lang="en-US"/>
               <a:t>Click to edit Master text styles</a:t>
             </a:r>
           </a:p>
           <a:p>
             <a:pPr lvl="1"/>
             <a:r>
-              <a:rPr lang="en-US" smtClean="0"/>
+              <a:rPr lang="en-US"/>
               <a:t>Second level</a:t>
             </a:r>
           </a:p>
           <a:p>
             <a:pPr lvl="2"/>
             <a:r>
-              <a:rPr lang="en-US" smtClean="0"/>
+              <a:rPr lang="en-US"/>
               <a:t>Third level</a:t>
             </a:r>
           </a:p>
           <a:p>
             <a:pPr lvl="3"/>
             <a:r>
-              <a:rPr lang="en-US" smtClean="0"/>
+              <a:rPr lang="en-US"/>
               <a:t>Fourth level</a:t>
             </a:r>
           </a:p>
           <a:p>
             <a:pPr lvl="4"/>
             <a:r>
-              <a:rPr lang="en-US" smtClean="0"/>
+              <a:rPr lang="en-US"/>
               <a:t>Fifth level</a:t>
             </a:r>
-            <a:endParaRPr lang="en-US"/>
           </a:p>
         </p:txBody>
       </p:sp>
@@ -1777,7 +1778,7 @@
           <a:p>
             <a:fld id="{5BCAD085-E8A6-8845-BD4E-CB4CCA059FC4}" type="datetimeFigureOut">
               <a:rPr lang="en-US" smtClean="0"/>
-              <a:t>1/27/13</a:t>
+              <a:t>9/10/2026</a:t>
             </a:fld>
             <a:endParaRPr lang="en-US"/>
           </a:p>
@@ -1871,10 +1872,9 @@
           <a:lstStyle/>
           <a:p>
             <a:r>
-              <a:rPr lang="en-US" smtClean="0"/>
+              <a:rPr lang="en-US"/>
               <a:t>Click to edit Master title style</a:t>
             </a:r>
-            <a:endParaRPr lang="en-US"/>
           </a:p>
         </p:txBody>
       </p:sp>
@@ -1895,7 +1895,7 @@
           <a:p>
             <a:fld id="{5BCAD085-E8A6-8845-BD4E-CB4CCA059FC4}" type="datetimeFigureOut">
               <a:rPr lang="en-US" smtClean="0"/>
-              <a:t>1/27/13</a:t>
+              <a:t>9/10/2026</a:t>
             </a:fld>
             <a:endParaRPr lang="en-US"/>
           </a:p>
@@ -1990,7 +1990,7 @@
           <a:p>
             <a:fld id="{5BCAD085-E8A6-8845-BD4E-CB4CCA059FC4}" type="datetimeFigureOut">
               <a:rPr lang="en-US" smtClean="0"/>
-              <a:t>1/27/13</a:t>
+              <a:t>9/10/2026</a:t>
             </a:fld>
             <a:endParaRPr lang="en-US"/>
           </a:p>
@@ -2093,10 +2093,9 @@
           </a:lstStyle>
           <a:p>
             <a:r>
-              <a:rPr lang="en-US" smtClean="0"/>
+              <a:rPr lang="en-US"/>
               <a:t>Click to edit Master title style</a:t>
             </a:r>
-            <a:endParaRPr lang="en-US"/>
           </a:p>
         </p:txBody>
       </p:sp>
@@ -2150,38 +2149,37 @@
           <a:p>
             <a:pPr lvl="0"/>
             <a:r>
-              <a:rPr lang="en-US" smtClean="0"/>
+              <a:rPr lang="en-US"/>
               <a:t>Click to edit Master text styles</a:t>
             </a:r>
           </a:p>
           <a:p>
             <a:pPr lvl="1"/>
             <a:r>
-              <a:rPr lang="en-US" smtClean="0"/>
+              <a:rPr lang="en-US"/>
               <a:t>Second level</a:t>
             </a:r>
           </a:p>
           <a:p>
             <a:pPr lvl="2"/>
             <a:r>
-              <a:rPr lang="en-US" smtClean="0"/>
+              <a:rPr lang="en-US"/>
               <a:t>Third level</a:t>
             </a:r>
           </a:p>
           <a:p>
             <a:pPr lvl="3"/>
             <a:r>
-              <a:rPr lang="en-US" smtClean="0"/>
+              <a:rPr lang="en-US"/>
               <a:t>Fourth level</a:t>
             </a:r>
           </a:p>
           <a:p>
             <a:pPr lvl="4"/>
             <a:r>
-              <a:rPr lang="en-US" smtClean="0"/>
+              <a:rPr lang="en-US"/>
               <a:t>Fifth level</a:t>
             </a:r>
-            <a:endParaRPr lang="en-US"/>
           </a:p>
         </p:txBody>
       </p:sp>
@@ -2244,7 +2242,7 @@
           <a:p>
             <a:pPr lvl="0"/>
             <a:r>
-              <a:rPr lang="en-US" smtClean="0"/>
+              <a:rPr lang="en-US"/>
               <a:t>Click to edit Master text styles</a:t>
             </a:r>
           </a:p>
@@ -2267,7 +2265,7 @@
           <a:p>
             <a:fld id="{5BCAD085-E8A6-8845-BD4E-CB4CCA059FC4}" type="datetimeFigureOut">
               <a:rPr lang="en-US" smtClean="0"/>
-              <a:t>1/27/13</a:t>
+              <a:t>9/10/2026</a:t>
             </a:fld>
             <a:endParaRPr lang="en-US"/>
           </a:p>
@@ -2370,10 +2368,9 @@
           </a:lstStyle>
           <a:p>
             <a:r>
-              <a:rPr lang="en-US" smtClean="0"/>
+              <a:rPr lang="en-US"/>
               <a:t>Click to edit Master title style</a:t>
             </a:r>
-            <a:endParaRPr lang="en-US"/>
           </a:p>
         </p:txBody>
       </p:sp>
@@ -2497,7 +2494,7 @@
           <a:p>
             <a:pPr lvl="0"/>
             <a:r>
-              <a:rPr lang="en-US" smtClean="0"/>
+              <a:rPr lang="en-US"/>
               <a:t>Click to edit Master text styles</a:t>
             </a:r>
           </a:p>
@@ -2520,7 +2517,7 @@
           <a:p>
             <a:fld id="{5BCAD085-E8A6-8845-BD4E-CB4CCA059FC4}" type="datetimeFigureOut">
               <a:rPr lang="en-US" smtClean="0"/>
-              <a:t>1/27/13</a:t>
+              <a:t>9/10/2026</a:t>
             </a:fld>
             <a:endParaRPr lang="en-US"/>
           </a:p>
@@ -2629,10 +2626,9 @@
           <a:lstStyle/>
           <a:p>
             <a:r>
-              <a:rPr lang="en-US" smtClean="0"/>
+              <a:rPr lang="en-US"/>
               <a:t>Click to edit Master title style</a:t>
             </a:r>
-            <a:endParaRPr lang="en-US"/>
           </a:p>
         </p:txBody>
       </p:sp>
@@ -2663,38 +2659,37 @@
           <a:p>
             <a:pPr lvl="0"/>
             <a:r>
-              <a:rPr lang="en-US" smtClean="0"/>
+              <a:rPr lang="en-US"/>
               <a:t>Click to edit Master text styles</a:t>
             </a:r>
           </a:p>
           <a:p>
             <a:pPr lvl="1"/>
             <a:r>
-              <a:rPr lang="en-US" smtClean="0"/>
+              <a:rPr lang="en-US"/>
               <a:t>Second level</a:t>
             </a:r>
           </a:p>
           <a:p>
             <a:pPr lvl="2"/>
             <a:r>
-              <a:rPr lang="en-US" smtClean="0"/>
+              <a:rPr lang="en-US"/>
               <a:t>Third level</a:t>
             </a:r>
           </a:p>
           <a:p>
             <a:pPr lvl="3"/>
             <a:r>
-              <a:rPr lang="en-US" smtClean="0"/>
+              <a:rPr lang="en-US"/>
               <a:t>Fourth level</a:t>
             </a:r>
           </a:p>
           <a:p>
             <a:pPr lvl="4"/>
             <a:r>
-              <a:rPr lang="en-US" smtClean="0"/>
+              <a:rPr lang="en-US"/>
               <a:t>Fifth level</a:t>
             </a:r>
-            <a:endParaRPr lang="en-US"/>
           </a:p>
         </p:txBody>
       </p:sp>
@@ -2733,7 +2728,7 @@
           <a:p>
             <a:fld id="{5BCAD085-E8A6-8845-BD4E-CB4CCA059FC4}" type="datetimeFigureOut">
               <a:rPr lang="en-US" smtClean="0"/>
-              <a:t>1/27/13</a:t>
+              <a:t>9/10/2026</a:t>
             </a:fld>
             <a:endParaRPr lang="en-US"/>
           </a:p>
@@ -3092,7 +3087,7 @@
 </file>
 
 <file path=ppt/slides/slide1.xml><?xml version="1.0" encoding="utf-8"?>
-<p:sld xmlns:a="http://schemas.openxmlformats.org/drawingml/2006/main" xmlns:p="http://schemas.openxmlformats.org/presentationml/2006/main" xmlns:r="http://schemas.openxmlformats.org/officeDocument/2006/relationships">
+<p:sld xmlns:a="http://schemas.openxmlformats.org/drawingml/2006/main" xmlns:r="http://schemas.openxmlformats.org/officeDocument/2006/relationships" xmlns:p="http://schemas.openxmlformats.org/presentationml/2006/main">
   <p:cSld>
     <p:spTree>
       <p:nvGrpSpPr>
@@ -3100,7 +3095,14 @@
         <p:cNvGrpSpPr/>
         <p:nvPr/>
       </p:nvGrpSpPr>
-      <p:grpSpPr/>
+      <p:grpSpPr>
+        <a:xfrm>
+          <a:off x="0" y="0"/>
+          <a:ext cx="0" cy="0"/>
+          <a:chOff x="0" y="0"/>
+          <a:chExt cx="0" cy="0"/>
+        </a:xfrm>
+      </p:grpSpPr>
       <p:sp>
         <p:nvSpPr>
           <p:cNvPr id="2" name="Rectangle 1"/>
@@ -3142,6 +3144,7 @@
           <a:lstStyle/>
           <a:p>
             <a:pPr algn="ctr"/>
+            <a:endParaRPr/>
           </a:p>
         </p:txBody>
       </p:sp>
@@ -3321,6 +3324,7 @@
           <a:lstStyle/>
           <a:p>
             <a:pPr algn="ctr"/>
+            <a:endParaRPr/>
           </a:p>
         </p:txBody>
       </p:sp>
@@ -3399,7 +3403,7 @@
         </p:nvSpPr>
         <p:spPr>
           <a:xfrm>
-            <a:off x="8595360" y="2011680"/>
+            <a:off x="8398714" y="3701059"/>
             <a:ext cx="2834640" cy="2377440"/>
           </a:xfrm>
           <a:prstGeom prst="roundRect">
@@ -3436,6 +3440,7 @@
           <a:lstStyle/>
           <a:p>
             <a:pPr algn="ctr"/>
+            <a:endParaRPr/>
           </a:p>
         </p:txBody>
       </p:sp>
@@ -3447,7 +3452,7 @@
         </p:nvSpPr>
         <p:spPr>
           <a:xfrm>
-            <a:off x="8869680" y="2286000"/>
+            <a:off x="8467294" y="3975379"/>
             <a:ext cx="2286000" cy="1828800"/>
           </a:xfrm>
           <a:prstGeom prst="rect">
@@ -3473,7 +3478,7 @@
               </a:spcAft>
             </a:pPr>
             <a:r>
-              <a:rPr sz="1500" b="1" i="0">
+              <a:rPr sz="1500" b="1" i="0" dirty="0">
                 <a:solidFill>
                   <a:srgbClr val="141B26"/>
                 </a:solidFill>
@@ -3495,7 +3500,7 @@
               </a:spcAft>
             </a:pPr>
             <a:r>
-              <a:rPr sz="1500" b="1" i="0">
+              <a:rPr sz="1500" b="1" i="0" dirty="0">
                 <a:solidFill>
                   <a:srgbClr val="141B26"/>
                 </a:solidFill>
@@ -3517,7 +3522,7 @@
               </a:spcAft>
             </a:pPr>
             <a:r>
-              <a:rPr sz="1500" b="1" i="0">
+              <a:rPr sz="1500" b="1" i="0" dirty="0">
                 <a:solidFill>
                   <a:srgbClr val="141B26"/>
                 </a:solidFill>
@@ -3539,7 +3544,7 @@
               </a:spcAft>
             </a:pPr>
             <a:r>
-              <a:rPr sz="1500" b="1" i="0">
+              <a:rPr sz="1500" b="1" i="0" dirty="0">
                 <a:solidFill>
                   <a:srgbClr val="141B26"/>
                 </a:solidFill>
@@ -3561,7 +3566,7 @@
               </a:spcAft>
             </a:pPr>
             <a:r>
-              <a:rPr sz="1500" b="1" i="0">
+              <a:rPr sz="1500" b="1" i="0" dirty="0">
                 <a:solidFill>
                   <a:srgbClr val="1F6FEB"/>
                 </a:solidFill>
@@ -3581,7 +3586,7 @@
 </file>
 
 <file path=ppt/slides/slide10.xml><?xml version="1.0" encoding="utf-8"?>
-<p:sld xmlns:a="http://schemas.openxmlformats.org/drawingml/2006/main" xmlns:p="http://schemas.openxmlformats.org/presentationml/2006/main" xmlns:r="http://schemas.openxmlformats.org/officeDocument/2006/relationships">
+<p:sld xmlns:a="http://schemas.openxmlformats.org/drawingml/2006/main" xmlns:r="http://schemas.openxmlformats.org/officeDocument/2006/relationships" xmlns:p="http://schemas.openxmlformats.org/presentationml/2006/main">
   <p:cSld>
     <p:spTree>
       <p:nvGrpSpPr>
@@ -3589,7 +3594,14 @@
         <p:cNvGrpSpPr/>
         <p:nvPr/>
       </p:nvGrpSpPr>
-      <p:grpSpPr/>
+      <p:grpSpPr>
+        <a:xfrm>
+          <a:off x="0" y="0"/>
+          <a:ext cx="0" cy="0"/>
+          <a:chOff x="0" y="0"/>
+          <a:chExt cx="0" cy="0"/>
+        </a:xfrm>
+      </p:grpSpPr>
       <p:sp>
         <p:nvSpPr>
           <p:cNvPr id="2" name="Rectangle 1"/>
@@ -3631,6 +3643,7 @@
           <a:lstStyle/>
           <a:p>
             <a:pPr algn="ctr"/>
+            <a:endParaRPr/>
           </a:p>
         </p:txBody>
       </p:sp>
@@ -3765,6 +3778,7 @@
           <a:lstStyle/>
           <a:p>
             <a:pPr algn="ctr"/>
+            <a:endParaRPr/>
           </a:p>
         </p:txBody>
       </p:sp>
@@ -3813,6 +3827,7 @@
           <a:lstStyle/>
           <a:p>
             <a:pPr algn="ctr"/>
+            <a:endParaRPr/>
           </a:p>
         </p:txBody>
       </p:sp>
@@ -3861,6 +3876,7 @@
           <a:lstStyle/>
           <a:p>
             <a:pPr algn="ctr"/>
+            <a:endParaRPr/>
           </a:p>
         </p:txBody>
       </p:sp>
@@ -3905,6 +3921,7 @@
           <a:lstStyle/>
           <a:p>
             <a:pPr algn="ctr"/>
+            <a:endParaRPr/>
           </a:p>
         </p:txBody>
       </p:sp>
@@ -3949,6 +3966,7 @@
           <a:lstStyle/>
           <a:p>
             <a:pPr algn="ctr"/>
+            <a:endParaRPr/>
           </a:p>
         </p:txBody>
       </p:sp>
@@ -3993,6 +4011,7 @@
           <a:lstStyle/>
           <a:p>
             <a:pPr algn="ctr"/>
+            <a:endParaRPr/>
           </a:p>
         </p:txBody>
       </p:sp>
@@ -4037,6 +4056,7 @@
           <a:lstStyle/>
           <a:p>
             <a:pPr algn="ctr"/>
+            <a:endParaRPr/>
           </a:p>
         </p:txBody>
       </p:sp>
@@ -4171,6 +4191,7 @@
           <a:lstStyle/>
           <a:p>
             <a:pPr algn="ctr"/>
+            <a:endParaRPr/>
           </a:p>
         </p:txBody>
       </p:sp>
@@ -4219,6 +4240,7 @@
           <a:lstStyle/>
           <a:p>
             <a:pPr algn="ctr"/>
+            <a:endParaRPr/>
           </a:p>
         </p:txBody>
       </p:sp>
@@ -4267,6 +4289,7 @@
           <a:lstStyle/>
           <a:p>
             <a:pPr algn="ctr"/>
+            <a:endParaRPr/>
           </a:p>
         </p:txBody>
       </p:sp>
@@ -4311,6 +4334,7 @@
           <a:lstStyle/>
           <a:p>
             <a:pPr algn="ctr"/>
+            <a:endParaRPr/>
           </a:p>
         </p:txBody>
       </p:sp>
@@ -4355,6 +4379,7 @@
           <a:lstStyle/>
           <a:p>
             <a:pPr algn="ctr"/>
+            <a:endParaRPr/>
           </a:p>
         </p:txBody>
       </p:sp>
@@ -4399,6 +4424,7 @@
           <a:lstStyle/>
           <a:p>
             <a:pPr algn="ctr"/>
+            <a:endParaRPr/>
           </a:p>
         </p:txBody>
       </p:sp>
@@ -4443,6 +4469,7 @@
           <a:lstStyle/>
           <a:p>
             <a:pPr algn="ctr"/>
+            <a:endParaRPr/>
           </a:p>
         </p:txBody>
       </p:sp>
@@ -4577,6 +4604,7 @@
           <a:lstStyle/>
           <a:p>
             <a:pPr algn="ctr"/>
+            <a:endParaRPr/>
           </a:p>
         </p:txBody>
       </p:sp>
@@ -4625,6 +4653,7 @@
           <a:lstStyle/>
           <a:p>
             <a:pPr algn="ctr"/>
+            <a:endParaRPr/>
           </a:p>
         </p:txBody>
       </p:sp>
@@ -4673,6 +4702,7 @@
           <a:lstStyle/>
           <a:p>
             <a:pPr algn="ctr"/>
+            <a:endParaRPr/>
           </a:p>
         </p:txBody>
       </p:sp>
@@ -4717,6 +4747,7 @@
           <a:lstStyle/>
           <a:p>
             <a:pPr algn="ctr"/>
+            <a:endParaRPr/>
           </a:p>
         </p:txBody>
       </p:sp>
@@ -4761,6 +4792,7 @@
           <a:lstStyle/>
           <a:p>
             <a:pPr algn="ctr"/>
+            <a:endParaRPr/>
           </a:p>
         </p:txBody>
       </p:sp>
@@ -4805,6 +4837,7 @@
           <a:lstStyle/>
           <a:p>
             <a:pPr algn="ctr"/>
+            <a:endParaRPr/>
           </a:p>
         </p:txBody>
       </p:sp>
@@ -4849,6 +4882,7 @@
           <a:lstStyle/>
           <a:p>
             <a:pPr algn="ctr"/>
+            <a:endParaRPr/>
           </a:p>
         </p:txBody>
       </p:sp>
@@ -4983,6 +5017,7 @@
           <a:lstStyle/>
           <a:p>
             <a:pPr algn="ctr"/>
+            <a:endParaRPr/>
           </a:p>
         </p:txBody>
       </p:sp>
@@ -5031,6 +5066,7 @@
           <a:lstStyle/>
           <a:p>
             <a:pPr algn="ctr"/>
+            <a:endParaRPr/>
           </a:p>
         </p:txBody>
       </p:sp>
@@ -5079,6 +5115,7 @@
           <a:lstStyle/>
           <a:p>
             <a:pPr algn="ctr"/>
+            <a:endParaRPr/>
           </a:p>
         </p:txBody>
       </p:sp>
@@ -5123,6 +5160,7 @@
           <a:lstStyle/>
           <a:p>
             <a:pPr algn="ctr"/>
+            <a:endParaRPr/>
           </a:p>
         </p:txBody>
       </p:sp>
@@ -5167,6 +5205,7 @@
           <a:lstStyle/>
           <a:p>
             <a:pPr algn="ctr"/>
+            <a:endParaRPr/>
           </a:p>
         </p:txBody>
       </p:sp>
@@ -5211,6 +5250,7 @@
           <a:lstStyle/>
           <a:p>
             <a:pPr algn="ctr"/>
+            <a:endParaRPr/>
           </a:p>
         </p:txBody>
       </p:sp>
@@ -5255,6 +5295,7 @@
           <a:lstStyle/>
           <a:p>
             <a:pPr algn="ctr"/>
+            <a:endParaRPr/>
           </a:p>
         </p:txBody>
       </p:sp>
@@ -5391,6 +5432,7 @@
           <a:lstStyle/>
           <a:p>
             <a:pPr algn="ctr"/>
+            <a:endParaRPr/>
           </a:p>
         </p:txBody>
       </p:sp>
@@ -5493,7 +5535,7 @@
 </file>
 
 <file path=ppt/slides/slide11.xml><?xml version="1.0" encoding="utf-8"?>
-<p:sld xmlns:a="http://schemas.openxmlformats.org/drawingml/2006/main" xmlns:p="http://schemas.openxmlformats.org/presentationml/2006/main" xmlns:r="http://schemas.openxmlformats.org/officeDocument/2006/relationships">
+<p:sld xmlns:a="http://schemas.openxmlformats.org/drawingml/2006/main" xmlns:r="http://schemas.openxmlformats.org/officeDocument/2006/relationships" xmlns:p="http://schemas.openxmlformats.org/presentationml/2006/main">
   <p:cSld>
     <p:spTree>
       <p:nvGrpSpPr>
@@ -5501,7 +5543,14 @@
         <p:cNvGrpSpPr/>
         <p:nvPr/>
       </p:nvGrpSpPr>
-      <p:grpSpPr/>
+      <p:grpSpPr>
+        <a:xfrm>
+          <a:off x="0" y="0"/>
+          <a:ext cx="0" cy="0"/>
+          <a:chOff x="0" y="0"/>
+          <a:chExt cx="0" cy="0"/>
+        </a:xfrm>
+      </p:grpSpPr>
       <p:sp>
         <p:nvSpPr>
           <p:cNvPr id="2" name="Rectangle 1"/>
@@ -5543,6 +5592,7 @@
           <a:lstStyle/>
           <a:p>
             <a:pPr algn="ctr"/>
+            <a:endParaRPr/>
           </a:p>
         </p:txBody>
       </p:sp>
@@ -5677,6 +5727,7 @@
           <a:lstStyle/>
           <a:p>
             <a:pPr algn="ctr"/>
+            <a:endParaRPr/>
           </a:p>
         </p:txBody>
       </p:sp>
@@ -5768,6 +5819,7 @@
           <a:lstStyle/>
           <a:p>
             <a:pPr algn="ctr"/>
+            <a:endParaRPr/>
           </a:p>
         </p:txBody>
       </p:sp>
@@ -5904,6 +5956,7 @@
           <a:lstStyle/>
           <a:p>
             <a:pPr algn="ctr"/>
+            <a:endParaRPr/>
           </a:p>
         </p:txBody>
       </p:sp>
@@ -6040,6 +6093,7 @@
           <a:lstStyle/>
           <a:p>
             <a:pPr algn="ctr"/>
+            <a:endParaRPr/>
           </a:p>
         </p:txBody>
       </p:sp>
@@ -6176,6 +6230,7 @@
           <a:lstStyle/>
           <a:p>
             <a:pPr algn="ctr"/>
+            <a:endParaRPr/>
           </a:p>
         </p:txBody>
       </p:sp>
@@ -6312,6 +6367,7 @@
           <a:lstStyle/>
           <a:p>
             <a:pPr algn="ctr"/>
+            <a:endParaRPr/>
           </a:p>
         </p:txBody>
       </p:sp>
@@ -6448,6 +6504,7 @@
           <a:lstStyle/>
           <a:p>
             <a:pPr algn="ctr"/>
+            <a:endParaRPr/>
           </a:p>
         </p:txBody>
       </p:sp>
@@ -6584,6 +6641,7 @@
           <a:lstStyle/>
           <a:p>
             <a:pPr algn="ctr"/>
+            <a:endParaRPr/>
           </a:p>
         </p:txBody>
       </p:sp>
@@ -6767,6 +6825,7 @@
           <a:lstStyle/>
           <a:p>
             <a:pPr algn="ctr"/>
+            <a:endParaRPr/>
           </a:p>
         </p:txBody>
       </p:sp>
@@ -6905,6 +6964,7 @@
           <a:lstStyle/>
           <a:p>
             <a:pPr algn="ctr"/>
+            <a:endParaRPr/>
           </a:p>
         </p:txBody>
       </p:sp>
@@ -7043,6 +7103,7 @@
           <a:lstStyle/>
           <a:p>
             <a:pPr algn="ctr"/>
+            <a:endParaRPr/>
           </a:p>
         </p:txBody>
       </p:sp>
@@ -7179,6 +7240,7 @@
           <a:lstStyle/>
           <a:p>
             <a:pPr algn="ctr"/>
+            <a:endParaRPr/>
           </a:p>
         </p:txBody>
       </p:sp>
@@ -7416,7 +7478,7 @@
 </file>
 
 <file path=ppt/slides/slide12.xml><?xml version="1.0" encoding="utf-8"?>
-<p:sld xmlns:a="http://schemas.openxmlformats.org/drawingml/2006/main" xmlns:p="http://schemas.openxmlformats.org/presentationml/2006/main" xmlns:r="http://schemas.openxmlformats.org/officeDocument/2006/relationships">
+<p:sld xmlns:a="http://schemas.openxmlformats.org/drawingml/2006/main" xmlns:r="http://schemas.openxmlformats.org/officeDocument/2006/relationships" xmlns:p="http://schemas.openxmlformats.org/presentationml/2006/main">
   <p:cSld>
     <p:spTree>
       <p:nvGrpSpPr>
@@ -7424,7 +7486,14 @@
         <p:cNvGrpSpPr/>
         <p:nvPr/>
       </p:nvGrpSpPr>
-      <p:grpSpPr/>
+      <p:grpSpPr>
+        <a:xfrm>
+          <a:off x="0" y="0"/>
+          <a:ext cx="0" cy="0"/>
+          <a:chOff x="0" y="0"/>
+          <a:chExt cx="0" cy="0"/>
+        </a:xfrm>
+      </p:grpSpPr>
       <p:sp>
         <p:nvSpPr>
           <p:cNvPr id="2" name="Rectangle 1"/>
@@ -7466,6 +7535,7 @@
           <a:lstStyle/>
           <a:p>
             <a:pPr algn="ctr"/>
+            <a:endParaRPr/>
           </a:p>
         </p:txBody>
       </p:sp>
@@ -7600,6 +7670,7 @@
           <a:lstStyle/>
           <a:p>
             <a:pPr algn="ctr"/>
+            <a:endParaRPr/>
           </a:p>
         </p:txBody>
       </p:sp>
@@ -7648,6 +7719,7 @@
           <a:lstStyle/>
           <a:p>
             <a:pPr algn="ctr"/>
+            <a:endParaRPr/>
           </a:p>
         </p:txBody>
       </p:sp>
@@ -7692,6 +7764,7 @@
           <a:lstStyle/>
           <a:p>
             <a:pPr algn="ctr"/>
+            <a:endParaRPr/>
           </a:p>
         </p:txBody>
       </p:sp>
@@ -7830,6 +7903,7 @@
           <a:lstStyle/>
           <a:p>
             <a:pPr algn="ctr"/>
+            <a:endParaRPr/>
           </a:p>
         </p:txBody>
       </p:sp>
@@ -7874,6 +7948,7 @@
           <a:lstStyle/>
           <a:p>
             <a:pPr algn="ctr"/>
+            <a:endParaRPr/>
           </a:p>
         </p:txBody>
       </p:sp>
@@ -8012,6 +8087,7 @@
           <a:lstStyle/>
           <a:p>
             <a:pPr algn="ctr"/>
+            <a:endParaRPr/>
           </a:p>
         </p:txBody>
       </p:sp>
@@ -8056,6 +8132,7 @@
           <a:lstStyle/>
           <a:p>
             <a:pPr algn="ctr"/>
+            <a:endParaRPr/>
           </a:p>
         </p:txBody>
       </p:sp>
@@ -8194,6 +8271,7 @@
           <a:lstStyle/>
           <a:p>
             <a:pPr algn="ctr"/>
+            <a:endParaRPr/>
           </a:p>
         </p:txBody>
       </p:sp>
@@ -8238,6 +8316,7 @@
           <a:lstStyle/>
           <a:p>
             <a:pPr algn="ctr"/>
+            <a:endParaRPr/>
           </a:p>
         </p:txBody>
       </p:sp>
@@ -8385,7 +8464,7 @@
 </file>
 
 <file path=ppt/slides/slide13.xml><?xml version="1.0" encoding="utf-8"?>
-<p:sld xmlns:a="http://schemas.openxmlformats.org/drawingml/2006/main" xmlns:p="http://schemas.openxmlformats.org/presentationml/2006/main" xmlns:r="http://schemas.openxmlformats.org/officeDocument/2006/relationships">
+<p:sld xmlns:a="http://schemas.openxmlformats.org/drawingml/2006/main" xmlns:r="http://schemas.openxmlformats.org/officeDocument/2006/relationships" xmlns:p="http://schemas.openxmlformats.org/presentationml/2006/main">
   <p:cSld>
     <p:spTree>
       <p:nvGrpSpPr>
@@ -8393,7 +8472,14 @@
         <p:cNvGrpSpPr/>
         <p:nvPr/>
       </p:nvGrpSpPr>
-      <p:grpSpPr/>
+      <p:grpSpPr>
+        <a:xfrm>
+          <a:off x="0" y="0"/>
+          <a:ext cx="0" cy="0"/>
+          <a:chOff x="0" y="0"/>
+          <a:chExt cx="0" cy="0"/>
+        </a:xfrm>
+      </p:grpSpPr>
       <p:sp>
         <p:nvSpPr>
           <p:cNvPr id="2" name="Rectangle 1"/>
@@ -8435,6 +8521,7 @@
           <a:lstStyle/>
           <a:p>
             <a:pPr algn="ctr"/>
+            <a:endParaRPr/>
           </a:p>
         </p:txBody>
       </p:sp>
@@ -8569,6 +8656,7 @@
           <a:lstStyle/>
           <a:p>
             <a:pPr algn="ctr"/>
+            <a:endParaRPr/>
           </a:p>
         </p:txBody>
       </p:sp>
@@ -8617,6 +8705,7 @@
           <a:lstStyle/>
           <a:p>
             <a:pPr algn="ctr"/>
+            <a:endParaRPr/>
           </a:p>
         </p:txBody>
       </p:sp>
@@ -8661,6 +8750,7 @@
           <a:lstStyle/>
           <a:p>
             <a:pPr algn="ctr"/>
+            <a:endParaRPr/>
           </a:p>
         </p:txBody>
       </p:sp>
@@ -8844,6 +8934,7 @@
           <a:lstStyle/>
           <a:p>
             <a:pPr algn="ctr"/>
+            <a:endParaRPr/>
           </a:p>
         </p:txBody>
       </p:sp>
@@ -8888,6 +8979,7 @@
           <a:lstStyle/>
           <a:p>
             <a:pPr algn="ctr"/>
+            <a:endParaRPr/>
           </a:p>
         </p:txBody>
       </p:sp>
@@ -9071,6 +9163,7 @@
           <a:lstStyle/>
           <a:p>
             <a:pPr algn="ctr"/>
+            <a:endParaRPr/>
           </a:p>
         </p:txBody>
       </p:sp>
@@ -9115,6 +9208,7 @@
           <a:lstStyle/>
           <a:p>
             <a:pPr algn="ctr"/>
+            <a:endParaRPr/>
           </a:p>
         </p:txBody>
       </p:sp>
@@ -9298,6 +9392,7 @@
           <a:lstStyle/>
           <a:p>
             <a:pPr algn="ctr"/>
+            <a:endParaRPr/>
           </a:p>
         </p:txBody>
       </p:sp>
@@ -9342,6 +9437,7 @@
           <a:lstStyle/>
           <a:p>
             <a:pPr algn="ctr"/>
+            <a:endParaRPr/>
           </a:p>
         </p:txBody>
       </p:sp>
@@ -9534,7 +9630,7 @@
 </file>
 
 <file path=ppt/slides/slide14.xml><?xml version="1.0" encoding="utf-8"?>
-<p:sld xmlns:a="http://schemas.openxmlformats.org/drawingml/2006/main" xmlns:p="http://schemas.openxmlformats.org/presentationml/2006/main" xmlns:r="http://schemas.openxmlformats.org/officeDocument/2006/relationships">
+<p:sld xmlns:a="http://schemas.openxmlformats.org/drawingml/2006/main" xmlns:r="http://schemas.openxmlformats.org/officeDocument/2006/relationships" xmlns:p="http://schemas.openxmlformats.org/presentationml/2006/main">
   <p:cSld>
     <p:spTree>
       <p:nvGrpSpPr>
@@ -9542,7 +9638,14 @@
         <p:cNvGrpSpPr/>
         <p:nvPr/>
       </p:nvGrpSpPr>
-      <p:grpSpPr/>
+      <p:grpSpPr>
+        <a:xfrm>
+          <a:off x="0" y="0"/>
+          <a:ext cx="0" cy="0"/>
+          <a:chOff x="0" y="0"/>
+          <a:chExt cx="0" cy="0"/>
+        </a:xfrm>
+      </p:grpSpPr>
       <p:sp>
         <p:nvSpPr>
           <p:cNvPr id="2" name="Rectangle 1"/>
@@ -9584,6 +9687,7 @@
           <a:lstStyle/>
           <a:p>
             <a:pPr algn="ctr"/>
+            <a:endParaRPr/>
           </a:p>
         </p:txBody>
       </p:sp>
@@ -9718,6 +9822,7 @@
           <a:lstStyle/>
           <a:p>
             <a:pPr algn="ctr"/>
+            <a:endParaRPr/>
           </a:p>
         </p:txBody>
       </p:sp>
@@ -9887,7 +9992,7 @@
 </file>
 
 <file path=ppt/slides/slide2.xml><?xml version="1.0" encoding="utf-8"?>
-<p:sld xmlns:a="http://schemas.openxmlformats.org/drawingml/2006/main" xmlns:p="http://schemas.openxmlformats.org/presentationml/2006/main" xmlns:r="http://schemas.openxmlformats.org/officeDocument/2006/relationships">
+<p:sld xmlns:a="http://schemas.openxmlformats.org/drawingml/2006/main" xmlns:r="http://schemas.openxmlformats.org/officeDocument/2006/relationships" xmlns:p="http://schemas.openxmlformats.org/presentationml/2006/main">
   <p:cSld>
     <p:spTree>
       <p:nvGrpSpPr>
@@ -9895,7 +10000,14 @@
         <p:cNvGrpSpPr/>
         <p:nvPr/>
       </p:nvGrpSpPr>
-      <p:grpSpPr/>
+      <p:grpSpPr>
+        <a:xfrm>
+          <a:off x="0" y="0"/>
+          <a:ext cx="0" cy="0"/>
+          <a:chOff x="0" y="0"/>
+          <a:chExt cx="0" cy="0"/>
+        </a:xfrm>
+      </p:grpSpPr>
       <p:sp>
         <p:nvSpPr>
           <p:cNvPr id="2" name="Rectangle 1"/>
@@ -9937,6 +10049,7 @@
           <a:lstStyle/>
           <a:p>
             <a:pPr algn="ctr"/>
+            <a:endParaRPr/>
           </a:p>
         </p:txBody>
       </p:sp>
@@ -10071,6 +10184,7 @@
           <a:lstStyle/>
           <a:p>
             <a:pPr algn="ctr"/>
+            <a:endParaRPr/>
           </a:p>
         </p:txBody>
       </p:sp>
@@ -10162,6 +10276,7 @@
           <a:lstStyle/>
           <a:p>
             <a:pPr algn="ctr"/>
+            <a:endParaRPr/>
           </a:p>
         </p:txBody>
       </p:sp>
@@ -10256,6 +10371,7 @@
           <a:lstStyle/>
           <a:p>
             <a:pPr algn="ctr"/>
+            <a:endParaRPr/>
           </a:p>
         </p:txBody>
       </p:sp>
@@ -10350,6 +10466,7 @@
           <a:lstStyle/>
           <a:p>
             <a:pPr algn="ctr"/>
+            <a:endParaRPr/>
           </a:p>
         </p:txBody>
       </p:sp>
@@ -10446,6 +10563,7 @@
           <a:lstStyle/>
           <a:p>
             <a:pPr algn="ctr"/>
+            <a:endParaRPr/>
           </a:p>
         </p:txBody>
       </p:sp>
@@ -10748,7 +10866,7 @@
 </file>
 
 <file path=ppt/slides/slide3.xml><?xml version="1.0" encoding="utf-8"?>
-<p:sld xmlns:a="http://schemas.openxmlformats.org/drawingml/2006/main" xmlns:p="http://schemas.openxmlformats.org/presentationml/2006/main" xmlns:r="http://schemas.openxmlformats.org/officeDocument/2006/relationships">
+<p:sld xmlns:a="http://schemas.openxmlformats.org/drawingml/2006/main" xmlns:r="http://schemas.openxmlformats.org/officeDocument/2006/relationships" xmlns:p="http://schemas.openxmlformats.org/presentationml/2006/main">
   <p:cSld>
     <p:spTree>
       <p:nvGrpSpPr>
@@ -10756,7 +10874,14 @@
         <p:cNvGrpSpPr/>
         <p:nvPr/>
       </p:nvGrpSpPr>
-      <p:grpSpPr/>
+      <p:grpSpPr>
+        <a:xfrm>
+          <a:off x="0" y="0"/>
+          <a:ext cx="0" cy="0"/>
+          <a:chOff x="0" y="0"/>
+          <a:chExt cx="0" cy="0"/>
+        </a:xfrm>
+      </p:grpSpPr>
       <p:sp>
         <p:nvSpPr>
           <p:cNvPr id="2" name="Rectangle 1"/>
@@ -10798,6 +10923,7 @@
           <a:lstStyle/>
           <a:p>
             <a:pPr algn="ctr"/>
+            <a:endParaRPr/>
           </a:p>
         </p:txBody>
       </p:sp>
@@ -10932,6 +11058,7 @@
           <a:lstStyle/>
           <a:p>
             <a:pPr algn="ctr"/>
+            <a:endParaRPr/>
           </a:p>
         </p:txBody>
       </p:sp>
@@ -10978,6 +11105,7 @@
           <a:lstStyle/>
           <a:p>
             <a:pPr algn="ctr"/>
+            <a:endParaRPr/>
           </a:p>
         </p:txBody>
       </p:sp>
@@ -11022,6 +11150,7 @@
           <a:lstStyle/>
           <a:p>
             <a:pPr algn="ctr"/>
+            <a:endParaRPr/>
           </a:p>
         </p:txBody>
       </p:sp>
@@ -11248,6 +11377,7 @@
           <a:lstStyle/>
           <a:p>
             <a:pPr algn="ctr"/>
+            <a:endParaRPr/>
           </a:p>
         </p:txBody>
       </p:sp>
@@ -11292,6 +11422,7 @@
           <a:lstStyle/>
           <a:p>
             <a:pPr algn="ctr"/>
+            <a:endParaRPr/>
           </a:p>
         </p:txBody>
       </p:sp>
@@ -11518,6 +11649,7 @@
           <a:lstStyle/>
           <a:p>
             <a:pPr algn="ctr"/>
+            <a:endParaRPr/>
           </a:p>
         </p:txBody>
       </p:sp>
@@ -11562,6 +11694,7 @@
           <a:lstStyle/>
           <a:p>
             <a:pPr algn="ctr"/>
+            <a:endParaRPr/>
           </a:p>
         </p:txBody>
       </p:sp>
@@ -11788,6 +11921,7 @@
           <a:lstStyle/>
           <a:p>
             <a:pPr algn="ctr"/>
+            <a:endParaRPr/>
           </a:p>
         </p:txBody>
       </p:sp>
@@ -11890,7 +12024,7 @@
 </file>
 
 <file path=ppt/slides/slide4.xml><?xml version="1.0" encoding="utf-8"?>
-<p:sld xmlns:a="http://schemas.openxmlformats.org/drawingml/2006/main" xmlns:p="http://schemas.openxmlformats.org/presentationml/2006/main" xmlns:r="http://schemas.openxmlformats.org/officeDocument/2006/relationships">
+<p:sld xmlns:a="http://schemas.openxmlformats.org/drawingml/2006/main" xmlns:r="http://schemas.openxmlformats.org/officeDocument/2006/relationships" xmlns:p="http://schemas.openxmlformats.org/presentationml/2006/main">
   <p:cSld>
     <p:spTree>
       <p:nvGrpSpPr>
@@ -11898,7 +12032,14 @@
         <p:cNvGrpSpPr/>
         <p:nvPr/>
       </p:nvGrpSpPr>
-      <p:grpSpPr/>
+      <p:grpSpPr>
+        <a:xfrm>
+          <a:off x="0" y="0"/>
+          <a:ext cx="0" cy="0"/>
+          <a:chOff x="0" y="0"/>
+          <a:chExt cx="0" cy="0"/>
+        </a:xfrm>
+      </p:grpSpPr>
       <p:sp>
         <p:nvSpPr>
           <p:cNvPr id="2" name="Rectangle 1"/>
@@ -11940,6 +12081,7 @@
           <a:lstStyle/>
           <a:p>
             <a:pPr algn="ctr"/>
+            <a:endParaRPr/>
           </a:p>
         </p:txBody>
       </p:sp>
@@ -12074,6 +12216,7 @@
           <a:lstStyle/>
           <a:p>
             <a:pPr algn="ctr"/>
+            <a:endParaRPr/>
           </a:p>
         </p:txBody>
       </p:sp>
@@ -12167,6 +12310,7 @@
           <a:lstStyle/>
           <a:p>
             <a:pPr algn="ctr"/>
+            <a:endParaRPr/>
           </a:p>
         </p:txBody>
       </p:sp>
@@ -12211,6 +12355,7 @@
           <a:lstStyle/>
           <a:p>
             <a:pPr algn="ctr"/>
+            <a:endParaRPr/>
           </a:p>
         </p:txBody>
       </p:sp>
@@ -12390,6 +12535,7 @@
           <a:lstStyle/>
           <a:p>
             <a:pPr algn="ctr"/>
+            <a:endParaRPr/>
           </a:p>
         </p:txBody>
       </p:sp>
@@ -12438,6 +12584,7 @@
           <a:lstStyle/>
           <a:p>
             <a:pPr algn="ctr"/>
+            <a:endParaRPr/>
           </a:p>
         </p:txBody>
       </p:sp>
@@ -12482,6 +12629,7 @@
           <a:lstStyle/>
           <a:p>
             <a:pPr algn="ctr"/>
+            <a:endParaRPr/>
           </a:p>
         </p:txBody>
       </p:sp>
@@ -12661,6 +12809,7 @@
           <a:lstStyle/>
           <a:p>
             <a:pPr algn="ctr"/>
+            <a:endParaRPr/>
           </a:p>
         </p:txBody>
       </p:sp>
@@ -12709,6 +12858,7 @@
           <a:lstStyle/>
           <a:p>
             <a:pPr algn="ctr"/>
+            <a:endParaRPr/>
           </a:p>
         </p:txBody>
       </p:sp>
@@ -12753,6 +12903,7 @@
           <a:lstStyle/>
           <a:p>
             <a:pPr algn="ctr"/>
+            <a:endParaRPr/>
           </a:p>
         </p:txBody>
       </p:sp>
@@ -12932,6 +13083,7 @@
           <a:lstStyle/>
           <a:p>
             <a:pPr algn="ctr"/>
+            <a:endParaRPr/>
           </a:p>
         </p:txBody>
       </p:sp>
@@ -12980,6 +13132,7 @@
           <a:lstStyle/>
           <a:p>
             <a:pPr algn="ctr"/>
+            <a:endParaRPr/>
           </a:p>
         </p:txBody>
       </p:sp>
@@ -13024,6 +13177,7 @@
           <a:lstStyle/>
           <a:p>
             <a:pPr algn="ctr"/>
+            <a:endParaRPr/>
           </a:p>
         </p:txBody>
       </p:sp>
@@ -13203,6 +13357,7 @@
           <a:lstStyle/>
           <a:p>
             <a:pPr algn="ctr"/>
+            <a:endParaRPr/>
           </a:p>
         </p:txBody>
       </p:sp>
@@ -13251,6 +13406,7 @@
           <a:lstStyle/>
           <a:p>
             <a:pPr algn="ctr"/>
+            <a:endParaRPr/>
           </a:p>
         </p:txBody>
       </p:sp>
@@ -13295,6 +13451,7 @@
           <a:lstStyle/>
           <a:p>
             <a:pPr algn="ctr"/>
+            <a:endParaRPr/>
           </a:p>
         </p:txBody>
       </p:sp>
@@ -13476,6 +13633,7 @@
           <a:lstStyle/>
           <a:p>
             <a:pPr algn="ctr"/>
+            <a:endParaRPr/>
           </a:p>
         </p:txBody>
       </p:sp>
@@ -13578,7 +13736,7 @@
 </file>
 
 <file path=ppt/slides/slide5.xml><?xml version="1.0" encoding="utf-8"?>
-<p:sld xmlns:a="http://schemas.openxmlformats.org/drawingml/2006/main" xmlns:p="http://schemas.openxmlformats.org/presentationml/2006/main" xmlns:r="http://schemas.openxmlformats.org/officeDocument/2006/relationships">
+<p:sld xmlns:a="http://schemas.openxmlformats.org/drawingml/2006/main" xmlns:r="http://schemas.openxmlformats.org/officeDocument/2006/relationships" xmlns:p="http://schemas.openxmlformats.org/presentationml/2006/main">
   <p:cSld>
     <p:spTree>
       <p:nvGrpSpPr>
@@ -13586,7 +13744,14 @@
         <p:cNvGrpSpPr/>
         <p:nvPr/>
       </p:nvGrpSpPr>
-      <p:grpSpPr/>
+      <p:grpSpPr>
+        <a:xfrm>
+          <a:off x="0" y="0"/>
+          <a:ext cx="0" cy="0"/>
+          <a:chOff x="0" y="0"/>
+          <a:chExt cx="0" cy="0"/>
+        </a:xfrm>
+      </p:grpSpPr>
       <p:sp>
         <p:nvSpPr>
           <p:cNvPr id="2" name="Rectangle 1"/>
@@ -13628,6 +13793,7 @@
           <a:lstStyle/>
           <a:p>
             <a:pPr algn="ctr"/>
+            <a:endParaRPr/>
           </a:p>
         </p:txBody>
       </p:sp>
@@ -13762,6 +13928,7 @@
           <a:lstStyle/>
           <a:p>
             <a:pPr algn="ctr"/>
+            <a:endParaRPr/>
           </a:p>
         </p:txBody>
       </p:sp>
@@ -13853,6 +14020,7 @@
           <a:lstStyle/>
           <a:p>
             <a:pPr algn="ctr"/>
+            <a:endParaRPr/>
           </a:p>
         </p:txBody>
       </p:sp>
@@ -13989,6 +14157,7 @@
           <a:lstStyle/>
           <a:p>
             <a:pPr algn="ctr"/>
+            <a:endParaRPr/>
           </a:p>
         </p:txBody>
       </p:sp>
@@ -14127,6 +14296,7 @@
           <a:lstStyle/>
           <a:p>
             <a:pPr algn="ctr"/>
+            <a:endParaRPr/>
           </a:p>
         </p:txBody>
       </p:sp>
@@ -14229,7 +14399,7 @@
 </file>
 
 <file path=ppt/slides/slide6.xml><?xml version="1.0" encoding="utf-8"?>
-<p:sld xmlns:a="http://schemas.openxmlformats.org/drawingml/2006/main" xmlns:p="http://schemas.openxmlformats.org/presentationml/2006/main" xmlns:r="http://schemas.openxmlformats.org/officeDocument/2006/relationships">
+<p:sld xmlns:a="http://schemas.openxmlformats.org/drawingml/2006/main" xmlns:r="http://schemas.openxmlformats.org/officeDocument/2006/relationships" xmlns:p="http://schemas.openxmlformats.org/presentationml/2006/main">
   <p:cSld>
     <p:spTree>
       <p:nvGrpSpPr>
@@ -14237,7 +14407,14 @@
         <p:cNvGrpSpPr/>
         <p:nvPr/>
       </p:nvGrpSpPr>
-      <p:grpSpPr/>
+      <p:grpSpPr>
+        <a:xfrm>
+          <a:off x="0" y="0"/>
+          <a:ext cx="0" cy="0"/>
+          <a:chOff x="0" y="0"/>
+          <a:chExt cx="0" cy="0"/>
+        </a:xfrm>
+      </p:grpSpPr>
       <p:sp>
         <p:nvSpPr>
           <p:cNvPr id="2" name="Rectangle 1"/>
@@ -14279,6 +14456,7 @@
           <a:lstStyle/>
           <a:p>
             <a:pPr algn="ctr"/>
+            <a:endParaRPr/>
           </a:p>
         </p:txBody>
       </p:sp>
@@ -14413,6 +14591,7 @@
           <a:lstStyle/>
           <a:p>
             <a:pPr algn="ctr"/>
+            <a:endParaRPr/>
           </a:p>
         </p:txBody>
       </p:sp>
@@ -14461,6 +14640,7 @@
           <a:lstStyle/>
           <a:p>
             <a:pPr algn="ctr"/>
+            <a:endParaRPr/>
           </a:p>
         </p:txBody>
       </p:sp>
@@ -14505,6 +14685,7 @@
           <a:lstStyle/>
           <a:p>
             <a:pPr algn="ctr"/>
+            <a:endParaRPr/>
           </a:p>
         </p:txBody>
       </p:sp>
@@ -14688,6 +14869,7 @@
           <a:lstStyle/>
           <a:p>
             <a:pPr algn="ctr"/>
+            <a:endParaRPr/>
           </a:p>
         </p:txBody>
       </p:sp>
@@ -14732,6 +14914,7 @@
           <a:lstStyle/>
           <a:p>
             <a:pPr algn="ctr"/>
+            <a:endParaRPr/>
           </a:p>
         </p:txBody>
       </p:sp>
@@ -14915,6 +15098,7 @@
           <a:lstStyle/>
           <a:p>
             <a:pPr algn="ctr"/>
+            <a:endParaRPr/>
           </a:p>
         </p:txBody>
       </p:sp>
@@ -14959,6 +15143,7 @@
           <a:lstStyle/>
           <a:p>
             <a:pPr algn="ctr"/>
+            <a:endParaRPr/>
           </a:p>
         </p:txBody>
       </p:sp>
@@ -15140,6 +15325,7 @@
           <a:lstStyle/>
           <a:p>
             <a:pPr algn="ctr"/>
+            <a:endParaRPr/>
           </a:p>
         </p:txBody>
       </p:sp>
@@ -15422,7 +15608,7 @@
 </file>
 
 <file path=ppt/slides/slide7.xml><?xml version="1.0" encoding="utf-8"?>
-<p:sld xmlns:a="http://schemas.openxmlformats.org/drawingml/2006/main" xmlns:p="http://schemas.openxmlformats.org/presentationml/2006/main" xmlns:r="http://schemas.openxmlformats.org/officeDocument/2006/relationships">
+<p:sld xmlns:a="http://schemas.openxmlformats.org/drawingml/2006/main" xmlns:r="http://schemas.openxmlformats.org/officeDocument/2006/relationships" xmlns:p="http://schemas.openxmlformats.org/presentationml/2006/main">
   <p:cSld>
     <p:spTree>
       <p:nvGrpSpPr>
@@ -15430,7 +15616,14 @@
         <p:cNvGrpSpPr/>
         <p:nvPr/>
       </p:nvGrpSpPr>
-      <p:grpSpPr/>
+      <p:grpSpPr>
+        <a:xfrm>
+          <a:off x="0" y="0"/>
+          <a:ext cx="0" cy="0"/>
+          <a:chOff x="0" y="0"/>
+          <a:chExt cx="0" cy="0"/>
+        </a:xfrm>
+      </p:grpSpPr>
       <p:sp>
         <p:nvSpPr>
           <p:cNvPr id="2" name="Rectangle 1"/>
@@ -15472,6 +15665,7 @@
           <a:lstStyle/>
           <a:p>
             <a:pPr algn="ctr"/>
+            <a:endParaRPr/>
           </a:p>
         </p:txBody>
       </p:sp>
@@ -15606,6 +15800,7 @@
           <a:lstStyle/>
           <a:p>
             <a:pPr algn="ctr"/>
+            <a:endParaRPr/>
           </a:p>
         </p:txBody>
       </p:sp>
@@ -15697,6 +15892,7 @@
           <a:lstStyle/>
           <a:p>
             <a:pPr algn="ctr"/>
+            <a:endParaRPr/>
           </a:p>
         </p:txBody>
       </p:sp>
@@ -15923,6 +16119,7 @@
           <a:lstStyle/>
           <a:p>
             <a:pPr algn="ctr"/>
+            <a:endParaRPr/>
           </a:p>
         </p:txBody>
       </p:sp>
@@ -16151,6 +16348,7 @@
           <a:lstStyle/>
           <a:p>
             <a:pPr algn="ctr"/>
+            <a:endParaRPr/>
           </a:p>
         </p:txBody>
       </p:sp>
@@ -16253,7 +16451,7 @@
 </file>
 
 <file path=ppt/slides/slide8.xml><?xml version="1.0" encoding="utf-8"?>
-<p:sld xmlns:a="http://schemas.openxmlformats.org/drawingml/2006/main" xmlns:p="http://schemas.openxmlformats.org/presentationml/2006/main" xmlns:r="http://schemas.openxmlformats.org/officeDocument/2006/relationships">
+<p:sld xmlns:a="http://schemas.openxmlformats.org/drawingml/2006/main" xmlns:r="http://schemas.openxmlformats.org/officeDocument/2006/relationships" xmlns:p="http://schemas.openxmlformats.org/presentationml/2006/main">
   <p:cSld>
     <p:spTree>
       <p:nvGrpSpPr>
@@ -16261,7 +16459,14 @@
         <p:cNvGrpSpPr/>
         <p:nvPr/>
       </p:nvGrpSpPr>
-      <p:grpSpPr/>
+      <p:grpSpPr>
+        <a:xfrm>
+          <a:off x="0" y="0"/>
+          <a:ext cx="0" cy="0"/>
+          <a:chOff x="0" y="0"/>
+          <a:chExt cx="0" cy="0"/>
+        </a:xfrm>
+      </p:grpSpPr>
       <p:sp>
         <p:nvSpPr>
           <p:cNvPr id="2" name="Rectangle 1"/>
@@ -16303,6 +16508,7 @@
           <a:lstStyle/>
           <a:p>
             <a:pPr algn="ctr"/>
+            <a:endParaRPr/>
           </a:p>
         </p:txBody>
       </p:sp>
@@ -16437,6 +16643,7 @@
           <a:lstStyle/>
           <a:p>
             <a:pPr algn="ctr"/>
+            <a:endParaRPr/>
           </a:p>
         </p:txBody>
       </p:sp>
@@ -16483,6 +16690,7 @@
           <a:lstStyle/>
           <a:p>
             <a:pPr algn="ctr"/>
+            <a:endParaRPr/>
           </a:p>
         </p:txBody>
       </p:sp>
@@ -16664,6 +16872,7 @@
           <a:lstStyle/>
           <a:p>
             <a:pPr algn="ctr"/>
+            <a:endParaRPr/>
           </a:p>
         </p:txBody>
       </p:sp>
@@ -16845,6 +17054,7 @@
           <a:lstStyle/>
           <a:p>
             <a:pPr algn="ctr"/>
+            <a:endParaRPr/>
           </a:p>
         </p:txBody>
       </p:sp>
@@ -17026,6 +17236,7 @@
           <a:lstStyle/>
           <a:p>
             <a:pPr algn="ctr"/>
+            <a:endParaRPr/>
           </a:p>
         </p:txBody>
       </p:sp>
@@ -17254,6 +17465,7 @@
           <a:lstStyle/>
           <a:p>
             <a:pPr algn="ctr"/>
+            <a:endParaRPr/>
           </a:p>
         </p:txBody>
       </p:sp>
@@ -17435,6 +17647,7 @@
           <a:lstStyle/>
           <a:p>
             <a:pPr algn="ctr"/>
+            <a:endParaRPr/>
           </a:p>
         </p:txBody>
       </p:sp>
@@ -17528,6 +17741,7 @@
           <a:lstStyle/>
           <a:p>
             <a:pPr algn="ctr"/>
+            <a:endParaRPr/>
           </a:p>
         </p:txBody>
       </p:sp>
@@ -17709,6 +17923,7 @@
           <a:lstStyle/>
           <a:p>
             <a:pPr algn="ctr"/>
+            <a:endParaRPr/>
           </a:p>
         </p:txBody>
       </p:sp>
@@ -17802,6 +18017,7 @@
           <a:lstStyle/>
           <a:p>
             <a:pPr algn="ctr"/>
+            <a:endParaRPr/>
           </a:p>
         </p:txBody>
       </p:sp>
@@ -17983,6 +18199,7 @@
           <a:lstStyle/>
           <a:p>
             <a:pPr algn="ctr"/>
+            <a:endParaRPr/>
           </a:p>
         </p:txBody>
       </p:sp>
@@ -18085,7 +18302,7 @@
 </file>
 
 <file path=ppt/slides/slide9.xml><?xml version="1.0" encoding="utf-8"?>
-<p:sld xmlns:a="http://schemas.openxmlformats.org/drawingml/2006/main" xmlns:p="http://schemas.openxmlformats.org/presentationml/2006/main" xmlns:r="http://schemas.openxmlformats.org/officeDocument/2006/relationships">
+<p:sld xmlns:a="http://schemas.openxmlformats.org/drawingml/2006/main" xmlns:r="http://schemas.openxmlformats.org/officeDocument/2006/relationships" xmlns:p="http://schemas.openxmlformats.org/presentationml/2006/main">
   <p:cSld>
     <p:spTree>
       <p:nvGrpSpPr>
@@ -18093,7 +18310,14 @@
         <p:cNvGrpSpPr/>
         <p:nvPr/>
       </p:nvGrpSpPr>
-      <p:grpSpPr/>
+      <p:grpSpPr>
+        <a:xfrm>
+          <a:off x="0" y="0"/>
+          <a:ext cx="0" cy="0"/>
+          <a:chOff x="0" y="0"/>
+          <a:chExt cx="0" cy="0"/>
+        </a:xfrm>
+      </p:grpSpPr>
       <p:sp>
         <p:nvSpPr>
           <p:cNvPr id="2" name="Rectangle 1"/>
@@ -18135,6 +18359,7 @@
           <a:lstStyle/>
           <a:p>
             <a:pPr algn="ctr"/>
+            <a:endParaRPr/>
           </a:p>
         </p:txBody>
       </p:sp>
@@ -18269,6 +18494,7 @@
           <a:lstStyle/>
           <a:p>
             <a:pPr algn="ctr"/>
+            <a:endParaRPr/>
           </a:p>
         </p:txBody>
       </p:sp>
@@ -18360,6 +18586,7 @@
           <a:lstStyle/>
           <a:p>
             <a:pPr algn="ctr"/>
+            <a:endParaRPr/>
           </a:p>
         </p:txBody>
       </p:sp>
@@ -18404,6 +18631,7 @@
           <a:lstStyle/>
           <a:p>
             <a:pPr algn="ctr"/>
+            <a:endParaRPr/>
           </a:p>
         </p:txBody>
       </p:sp>
@@ -18585,6 +18813,7 @@
           <a:lstStyle/>
           <a:p>
             <a:pPr algn="ctr"/>
+            <a:endParaRPr/>
           </a:p>
         </p:txBody>
       </p:sp>
@@ -18629,6 +18858,7 @@
           <a:lstStyle/>
           <a:p>
             <a:pPr algn="ctr"/>
+            <a:endParaRPr/>
           </a:p>
         </p:txBody>
       </p:sp>
@@ -18810,6 +19040,7 @@
           <a:lstStyle/>
           <a:p>
             <a:pPr algn="ctr"/>
+            <a:endParaRPr/>
           </a:p>
         </p:txBody>
       </p:sp>
@@ -18854,6 +19085,7 @@
           <a:lstStyle/>
           <a:p>
             <a:pPr algn="ctr"/>
+            <a:endParaRPr/>
           </a:p>
         </p:txBody>
       </p:sp>
@@ -19035,6 +19267,7 @@
           <a:lstStyle/>
           <a:p>
             <a:pPr algn="ctr"/>
+            <a:endParaRPr/>
           </a:p>
         </p:txBody>
       </p:sp>
